--- a/esp32-class-projects/02_sessions/slides/3회차_ESP32_웹서버.pptx
+++ b/esp32-class-projects/02_sessions/slides/3회차_ESP32_웹서버.pptx
@@ -3634,7 +3634,7 @@
                 <a:ea typeface="Pretendard" pitchFamily="34" charset="-122"/>
                 <a:cs typeface="Pretendard" pitchFamily="34" charset="-120"/>
               </a:rPr>
-              <a:t>폰 한 화면에서 : LED 켜기/끄기 + 입력한 글자를 교실 LCD로 전송 + 온습도 실시간 표시</a:t>
+              <a:t>폰 한 화면에서 : LED 켜기/끄기 + 입력한 숫자를 교실 7세그로 전송 + 온습도 실시간 표시</a:t>
             </a:r>
             <a:endParaRPr lang="en-US" sz="1500" dirty="0"/>
           </a:p>
@@ -3762,7 +3762,7 @@
                 <a:ea typeface="Pretendard" pitchFamily="34" charset="-122"/>
                 <a:cs typeface="Pretendard" pitchFamily="34" charset="-120"/>
               </a:rPr>
-              <a:t>☐  글자 입력창 + [보내기] → 그 글자가 교실 LCD에 표시 (/lcd 엔드포인트)</a:t>
+              <a:t>☐  숫자 입력창 + [보내기] → 그 숫자가 교실 7세그에 표시 (/seg 엔드포인트)</a:t>
             </a:r>
             <a:endParaRPr lang="en-US" sz="1450" dirty="0"/>
           </a:p>
@@ -3802,7 +3802,7 @@
                 <a:ea typeface="Pretendard" pitchFamily="34" charset="-122"/>
                 <a:cs typeface="Pretendard" pitchFamily="34" charset="-120"/>
               </a:rPr>
-              <a:t>☐  팀원 폰 최소 2대에서 동시 접속 성공 — 서로 LCD에 인사를 보내 봐요!</a:t>
+              <a:t>☐  팀원 폰 최소 2대에서 동시 접속 성공 — 서로 7세그에 번호를 보내 봐요!</a:t>
             </a:r>
             <a:endParaRPr lang="en-US" sz="1450" dirty="0"/>
           </a:p>
@@ -3863,7 +3863,7 @@
                 <a:ea typeface="Pretendard" pitchFamily="34" charset="-122"/>
                 <a:cs typeface="Pretendard" pitchFamily="34" charset="-120"/>
               </a:rPr>
-              <a:t>💡 힌트  하나 완성 → 테스트 → 다음 추가! LCD는 server.arg("msg")로 글자를 꺼내 lcd.print, 웹은 fetch('/lcd?msg=' + 입력값)</a:t>
+              <a:t>💡 힌트  하나 완성 → 테스트 → 다음 추가! 7세그는 server.arg("n").toInt()로 숫자를 꺼내 showNumberDec, 웹은 fetch('/seg?n=' + 입력값)</a:t>
             </a:r>
             <a:endParaRPr lang="en-US" sz="1400" dirty="0"/>
           </a:p>
@@ -6269,7 +6269,7 @@
                 <a:ea typeface="Pretendard" pitchFamily="34" charset="-122"/>
                 <a:cs typeface="Pretendard" pitchFamily="34" charset="-120"/>
               </a:rPr>
-              <a:t>웹 버튼 → ESP32 → LED·LCD로 이어지는 '제어 흐름'을 구현할 수 있어요</a:t>
+              <a:t>웹 버튼 → ESP32 → LED·7세그로 이어지는 '제어 흐름'을 구현할 수 있어요</a:t>
             </a:r>
             <a:endParaRPr lang="en-US" sz="1450" dirty="0"/>
           </a:p>
@@ -12248,7 +12248,7 @@
                 <a:ea typeface="Pretendard" pitchFamily="34" charset="-122"/>
                 <a:cs typeface="Pretendard" pitchFamily="34" charset="-120"/>
               </a:rPr>
-              <a:t>모든 IoT 제품(스마트 전구, 로봇청소기 앱)이 이 구조 — LCD도 엔드포인트 하나면 추가 끝 (/lcd?msg=hello)</a:t>
+              <a:t>모든 IoT 제품(스마트 전구, 로봇청소기 앱)이 이 구조 — 7세그도 엔드포인트 하나면 추가 끝 (/seg?n=17)</a:t>
             </a:r>
             <a:endParaRPr lang="en-US" sz="1400" dirty="0"/>
           </a:p>
